--- a/examples/warm.pptx
+++ b/examples/warm.pptx
@@ -14,6 +14,7 @@
     <p:sldId id="262" r:id="rId13"/>
     <p:sldId id="263" r:id="rId14"/>
     <p:sldId id="264" r:id="rId15"/>
+    <p:sldId id="265" r:id="rId16"/>
   </p:sldIdLst>
   <p:sldSz cx="12192000" cy="6858000" type="screen4x3"/>
   <p:notesSz cx="6858000" cy="9144000"/>
@@ -3887,7 +3888,7 @@
                 <a:latin typeface="Noto Sans TC"/>
                 <a:ea typeface="Noto Sans TC"/>
               </a:rPr>
-              <a:t>留白大（頁邊 96px）· 每頁 ≤50 字</a:t>
+              <a:t>留白大（頁邊 96px）· 字級不縮，裝不下就拆頁</a:t>
             </a:r>
           </a:p>
         </p:txBody>
@@ -4101,7 +4102,7 @@
         <p:spPr>
           <a:xfrm>
             <a:off x="9026425" y="4733925"/>
-            <a:ext cx="923925" cy="314325"/>
+            <a:ext cx="676275" cy="314325"/>
           </a:xfrm>
           <a:prstGeom prst="rect">
             <a:avLst/>
@@ -4127,7 +4128,7 @@
                 <a:latin typeface="Noto Sans TC"/>
                 <a:ea typeface="Noto Sans TC"/>
               </a:rPr>
-              <a:t>一頁一數字</a:t>
+              <a:t>長文頁</a:t>
             </a:r>
           </a:p>
         </p:txBody>
@@ -4140,8 +4141,8 @@
         </p:nvSpPr>
         <p:spPr>
           <a:xfrm>
-            <a:off x="9969400" y="4733925"/>
-            <a:ext cx="676275" cy="314325"/>
+            <a:off x="9721750" y="4733925"/>
+            <a:ext cx="923925" cy="314325"/>
           </a:xfrm>
           <a:prstGeom prst="rect">
             <a:avLst/>
@@ -4167,7 +4168,7 @@
                 <a:latin typeface="Noto Sans TC"/>
                 <a:ea typeface="Noto Sans TC"/>
               </a:rPr>
-              <a:t>章節頁</a:t>
+              <a:t>一頁一數字</a:t>
             </a:r>
           </a:p>
         </p:txBody>
@@ -4181,7 +4182,7 @@
         <p:spPr>
           <a:xfrm>
             <a:off x="8207275" y="5086350"/>
-            <a:ext cx="800100" cy="314325"/>
+            <a:ext cx="676275" cy="314325"/>
           </a:xfrm>
           <a:prstGeom prst="rect">
             <a:avLst/>
@@ -4207,7 +4208,7 @@
                 <a:latin typeface="Noto Sans TC"/>
                 <a:ea typeface="Noto Sans TC"/>
               </a:rPr>
-              <a:t>步驟流程</a:t>
+              <a:t>章節頁</a:t>
             </a:r>
           </a:p>
         </p:txBody>
@@ -4220,8 +4221,8 @@
         </p:nvSpPr>
         <p:spPr>
           <a:xfrm>
-            <a:off x="9026425" y="5086350"/>
-            <a:ext cx="552450" cy="314325"/>
+            <a:off x="8902600" y="5086350"/>
+            <a:ext cx="800100" cy="314325"/>
           </a:xfrm>
           <a:prstGeom prst="rect">
             <a:avLst/>
@@ -4247,6 +4248,46 @@
                 <a:latin typeface="Noto Sans TC"/>
                 <a:ea typeface="Noto Sans TC"/>
               </a:rPr>
+              <a:t>步驟流程</a:t>
+            </a:r>
+          </a:p>
+        </p:txBody>
+      </p:sp>
+      <p:sp>
+        <p:nvSpPr>
+          <p:cNvPr id="31" name="TextBox 30"/>
+          <p:cNvSpPr txBox="1"/>
+          <p:nvPr/>
+        </p:nvSpPr>
+        <p:spPr>
+          <a:xfrm>
+            <a:off x="9721750" y="5086350"/>
+            <a:ext cx="552450" cy="314325"/>
+          </a:xfrm>
+          <a:prstGeom prst="rect">
+            <a:avLst/>
+          </a:prstGeom>
+          <a:noFill/>
+        </p:spPr>
+        <p:txBody>
+          <a:bodyPr wrap="square" lIns="0" rIns="0" tIns="0" bIns="0" anchor="t">
+            <a:spAutoFit/>
+          </a:bodyPr>
+          <a:lstStyle/>
+          <a:p>
+            <a:pPr algn="l">
+              <a:lnSpc>
+                <a:spcPts val="2175"/>
+              </a:lnSpc>
+            </a:pPr>
+            <a:r>
+              <a:rPr sz="975" b="0">
+                <a:solidFill>
+                  <a:srgbClr val="2F4B8A"/>
+                </a:solidFill>
+                <a:latin typeface="Noto Sans TC"/>
+                <a:ea typeface="Noto Sans TC"/>
+              </a:rPr>
               <a:t>封底</a:t>
             </a:r>
           </a:p>
@@ -4254,7 +4295,7 @@
       </p:sp>
       <p:sp>
         <p:nvSpPr>
-          <p:cNvPr id="31" name="TextBox 30"/>
+          <p:cNvPr id="32" name="TextBox 31"/>
           <p:cNvSpPr txBox="1"/>
           <p:nvPr/>
         </p:nvSpPr>
@@ -4288,6 +4329,208 @@
                 <a:ea typeface="Noto Sans TC"/>
               </a:rPr>
               <a:t>01</a:t>
+            </a:r>
+          </a:p>
+        </p:txBody>
+      </p:sp>
+    </p:spTree>
+  </p:cSld>
+  <p:clrMapOvr>
+    <a:masterClrMapping/>
+  </p:clrMapOvr>
+</p:sld>
+</file>
+
+<file path=ppt/slides/slide10.xml><?xml version="1.0" encoding="utf-8"?>
+<p:sld xmlns:a="http://schemas.openxmlformats.org/drawingml/2006/main" xmlns:p="http://schemas.openxmlformats.org/presentationml/2006/main" xmlns:r="http://schemas.openxmlformats.org/officeDocument/2006/relationships">
+  <p:cSld>
+    <p:spTree>
+      <p:nvGrpSpPr>
+        <p:cNvPr id="1" name=""/>
+        <p:cNvGrpSpPr/>
+        <p:nvPr/>
+      </p:nvGrpSpPr>
+      <p:grpSpPr/>
+      <p:pic>
+        <p:nvPicPr>
+          <p:cNvPr id="2" name="Picture 1" descr="warm-10-bake.jpg"/>
+          <p:cNvPicPr>
+            <a:picLocks noChangeAspect="1"/>
+          </p:cNvPicPr>
+          <p:nvPr/>
+        </p:nvPicPr>
+        <p:blipFill>
+          <a:blip r:embed="rId2"/>
+          <a:stretch>
+            <a:fillRect/>
+          </a:stretch>
+        </p:blipFill>
+        <p:spPr>
+          <a:xfrm>
+            <a:off x="0" y="0"/>
+            <a:ext cx="12192000" cy="6858000"/>
+          </a:xfrm>
+          <a:prstGeom prst="rect">
+            <a:avLst/>
+          </a:prstGeom>
+        </p:spPr>
+      </p:pic>
+      <p:sp>
+        <p:nvSpPr>
+          <p:cNvPr id="3" name="TextBox 2"/>
+          <p:cNvSpPr txBox="1"/>
+          <p:nvPr/>
+        </p:nvSpPr>
+        <p:spPr>
+          <a:xfrm>
+            <a:off x="10163175" y="533400"/>
+            <a:ext cx="1171575" cy="228600"/>
+          </a:xfrm>
+          <a:prstGeom prst="rect">
+            <a:avLst/>
+          </a:prstGeom>
+          <a:noFill/>
+        </p:spPr>
+        <p:txBody>
+          <a:bodyPr wrap="square" lIns="0" rIns="0" tIns="0" bIns="0" anchor="t">
+            <a:spAutoFit/>
+          </a:bodyPr>
+          <a:lstStyle/>
+          <a:p>
+            <a:pPr algn="l">
+              <a:lnSpc>
+                <a:spcPts val="1500"/>
+              </a:lnSpc>
+            </a:pPr>
+            <a:r>
+              <a:rPr sz="1350" b="0" spc="405">
+                <a:solidFill>
+                  <a:srgbClr val="2F4B8A"/>
+                </a:solidFill>
+                <a:latin typeface="Iansui"/>
+                <a:ea typeface="Iansui"/>
+              </a:rPr>
+              <a:t>小日子烘焙</a:t>
+            </a:r>
+          </a:p>
+        </p:txBody>
+      </p:sp>
+      <p:sp>
+        <p:nvSpPr>
+          <p:cNvPr id="4" name="TextBox 3"/>
+          <p:cNvSpPr txBox="1"/>
+          <p:nvPr/>
+        </p:nvSpPr>
+        <p:spPr>
+          <a:xfrm>
+            <a:off x="914400" y="2840384"/>
+            <a:ext cx="10420350" cy="533400"/>
+          </a:xfrm>
+          <a:prstGeom prst="rect">
+            <a:avLst/>
+          </a:prstGeom>
+          <a:noFill/>
+        </p:spPr>
+        <p:txBody>
+          <a:bodyPr wrap="square" lIns="0" rIns="0" tIns="0" bIns="0" anchor="t">
+            <a:spAutoFit/>
+          </a:bodyPr>
+          <a:lstStyle/>
+          <a:p>
+            <a:pPr algn="l">
+              <a:lnSpc>
+                <a:spcPts val="3900"/>
+              </a:lnSpc>
+            </a:pPr>
+            <a:r>
+              <a:rPr sz="3000" b="0">
+                <a:solidFill>
+                  <a:srgbClr val="2F4B8A"/>
+                </a:solidFill>
+                <a:latin typeface="Iansui"/>
+                <a:ea typeface="Iansui"/>
+              </a:rPr>
+              <a:t>明天早上，先送一箱過去？</a:t>
+            </a:r>
+          </a:p>
+        </p:txBody>
+      </p:sp>
+      <p:sp>
+        <p:nvSpPr>
+          <p:cNvPr id="5" name="TextBox 4"/>
+          <p:cNvSpPr txBox="1"/>
+          <p:nvPr/>
+        </p:nvSpPr>
+        <p:spPr>
+          <a:xfrm>
+            <a:off x="914400" y="3640484"/>
+            <a:ext cx="10420350" cy="415230"/>
+          </a:xfrm>
+          <a:prstGeom prst="rect">
+            <a:avLst/>
+          </a:prstGeom>
+          <a:noFill/>
+        </p:spPr>
+        <p:txBody>
+          <a:bodyPr wrap="square" lIns="0" rIns="0" tIns="0" bIns="0" anchor="t">
+            <a:spAutoFit/>
+          </a:bodyPr>
+          <a:lstStyle/>
+          <a:p>
+            <a:pPr algn="l">
+              <a:lnSpc>
+                <a:spcPts val="2970"/>
+              </a:lnSpc>
+            </a:pPr>
+            <a:r>
+              <a:rPr sz="1650" b="0">
+                <a:solidFill>
+                  <a:srgbClr val="2F4B8A"/>
+                </a:solidFill>
+                <a:latin typeface="Noto Sans TC"/>
+                <a:ea typeface="Noto Sans TC"/>
+              </a:rPr>
+              <a:t>hi@littledays.example（示意，換成你的）</a:t>
+            </a:r>
+          </a:p>
+        </p:txBody>
+      </p:sp>
+      <p:sp>
+        <p:nvSpPr>
+          <p:cNvPr id="6" name="TextBox 5"/>
+          <p:cNvSpPr txBox="1"/>
+          <p:nvPr/>
+        </p:nvSpPr>
+        <p:spPr>
+          <a:xfrm>
+            <a:off x="11129367" y="6362700"/>
+            <a:ext cx="205382" cy="228600"/>
+          </a:xfrm>
+          <a:prstGeom prst="rect">
+            <a:avLst/>
+          </a:prstGeom>
+          <a:noFill/>
+        </p:spPr>
+        <p:txBody>
+          <a:bodyPr wrap="square" lIns="0" rIns="0" tIns="0" bIns="0" anchor="t">
+            <a:spAutoFit/>
+          </a:bodyPr>
+          <a:lstStyle/>
+          <a:p>
+            <a:pPr algn="l">
+              <a:lnSpc>
+                <a:spcPts val="1500"/>
+              </a:lnSpc>
+            </a:pPr>
+            <a:r>
+              <a:rPr sz="1050" b="0">
+                <a:solidFill>
+                  <a:srgbClr val="2F4B8A"/>
+                </a:solidFill>
+                <a:latin typeface="Noto Sans TC"/>
+                <a:ea typeface="Noto Sans TC"/>
+              </a:rPr>
+              <a:t>10</a:t>
             </a:r>
           </a:p>
         </p:txBody>
@@ -5569,34 +5812,34 @@
         </p:nvSpPr>
         <p:spPr>
           <a:xfrm>
-            <a:off x="914400" y="1939379"/>
-            <a:ext cx="10420350" cy="1943100"/>
-          </a:xfrm>
-          <a:prstGeom prst="rect">
-            <a:avLst/>
-          </a:prstGeom>
-          <a:noFill/>
-        </p:spPr>
-        <p:txBody>
-          <a:bodyPr wrap="square" lIns="0" rIns="0" tIns="0" bIns="0" anchor="t">
-            <a:spAutoFit/>
-          </a:bodyPr>
-          <a:lstStyle/>
-          <a:p>
-            <a:pPr algn="l">
-              <a:lnSpc>
-                <a:spcPts val="15000"/>
-              </a:lnSpc>
-            </a:pPr>
-            <a:r>
-              <a:rPr sz="15000" b="0">
-                <a:solidFill>
-                  <a:srgbClr val="E4A11B"/>
+            <a:off x="914400" y="914400"/>
+            <a:ext cx="10420350" cy="533400"/>
+          </a:xfrm>
+          <a:prstGeom prst="rect">
+            <a:avLst/>
+          </a:prstGeom>
+          <a:noFill/>
+        </p:spPr>
+        <p:txBody>
+          <a:bodyPr wrap="square" lIns="0" rIns="0" tIns="0" bIns="0" anchor="t">
+            <a:spAutoFit/>
+          </a:bodyPr>
+          <a:lstStyle/>
+          <a:p>
+            <a:pPr algn="l">
+              <a:lnSpc>
+                <a:spcPts val="3900"/>
+              </a:lnSpc>
+            </a:pPr>
+            <a:r>
+              <a:rPr sz="3000" b="0">
+                <a:solidFill>
+                  <a:srgbClr val="2F4B8A"/>
                 </a:solidFill>
                 <a:latin typeface="Iansui"/>
                 <a:ea typeface="Iansui"/>
               </a:rPr>
-              <a:t>1,200 位</a:t>
+              <a:t>內文多的時候</a:t>
             </a:r>
           </a:p>
         </p:txBody>
@@ -5609,8 +5852,8 @@
         </p:nvSpPr>
         <p:spPr>
           <a:xfrm>
-            <a:off x="914400" y="4072979"/>
-            <a:ext cx="6153150" cy="415230"/>
+            <a:off x="914400" y="2025253"/>
+            <a:ext cx="9963150" cy="792360"/>
           </a:xfrm>
           <a:prstGeom prst="rect">
             <a:avLst/>
@@ -5636,7 +5879,7 @@
                 <a:latin typeface="Noto Sans TC"/>
                 <a:ea typeface="Noto Sans TC"/>
               </a:rPr>
-              <a:t>每週固定回購的鄰居。</a:t>
+              <a:t>這一頁是假字，用來示範內文很多的時候版面長什麼樣。字級還是 22，行距照大腦的設定，段落一段接一段往下排，不因為字多就把字縮小，也不把留白吃掉。</a:t>
             </a:r>
           </a:p>
         </p:txBody>
@@ -5649,36 +5892,34 @@
         </p:nvSpPr>
         <p:spPr>
           <a:xfrm>
-            <a:off x="914400" y="4678709"/>
-            <a:ext cx="6153150" cy="278010"/>
-          </a:xfrm>
-          <a:prstGeom prst="rect">
-            <a:avLst/>
-          </a:prstGeom>
-          <a:noFill/>
-        </p:spPr>
-        <p:txBody>
-          <a:bodyPr wrap="square" lIns="0" rIns="0" tIns="0" bIns="0" anchor="t">
-            <a:spAutoFit/>
-          </a:bodyPr>
-          <a:lstStyle/>
-          <a:p>
-            <a:pPr algn="l">
-              <a:lnSpc>
-                <a:spcPts val="1889"/>
-              </a:lnSpc>
-            </a:pPr>
-            <a:r>
-              <a:rPr sz="1050" b="0">
-                <a:solidFill>
-                  <a:srgbClr val="2F4B8A">
-                    <a:alpha val="85000"/>
-                  </a:srgbClr>
+            <a:off x="914400" y="2950964"/>
+            <a:ext cx="9963150" cy="792360"/>
+          </a:xfrm>
+          <a:prstGeom prst="rect">
+            <a:avLst/>
+          </a:prstGeom>
+          <a:noFill/>
+        </p:spPr>
+        <p:txBody>
+          <a:bodyPr wrap="square" lIns="0" rIns="0" tIns="0" bIns="0" anchor="t">
+            <a:spAutoFit/>
+          </a:bodyPr>
+          <a:lstStyle/>
+          <a:p>
+            <a:pPr algn="l">
+              <a:lnSpc>
+                <a:spcPts val="2970"/>
+              </a:lnSpc>
+            </a:pPr>
+            <a:r>
+              <a:rPr sz="1650" b="0">
+                <a:solidFill>
+                  <a:srgbClr val="23262E"/>
                 </a:solidFill>
                 <a:latin typeface="Noto Sans TC"/>
                 <a:ea typeface="Noto Sans TC"/>
               </a:rPr>
-              <a:t>示意數字，換成你的。</a:t>
+              <a:t>假字假字，這裡通常會放一段背景說明：為什麼要做這件事、之前試過什麼、現在卡在哪裡。寫的時候一段只講一個重點，讀的人才跟得上，講的人也不會念到一半迷路。</a:t>
             </a:r>
           </a:p>
         </p:txBody>
@@ -5686,6 +5927,86 @@
       <p:sp>
         <p:nvSpPr>
           <p:cNvPr id="7" name="TextBox 6"/>
+          <p:cNvSpPr txBox="1"/>
+          <p:nvPr/>
+        </p:nvSpPr>
+        <p:spPr>
+          <a:xfrm>
+            <a:off x="914400" y="3876675"/>
+            <a:ext cx="9963150" cy="792360"/>
+          </a:xfrm>
+          <a:prstGeom prst="rect">
+            <a:avLst/>
+          </a:prstGeom>
+          <a:noFill/>
+        </p:spPr>
+        <p:txBody>
+          <a:bodyPr wrap="square" lIns="0" rIns="0" tIns="0" bIns="0" anchor="t">
+            <a:spAutoFit/>
+          </a:bodyPr>
+          <a:lstStyle/>
+          <a:p>
+            <a:pPr algn="l">
+              <a:lnSpc>
+                <a:spcPts val="2970"/>
+              </a:lnSpc>
+            </a:pPr>
+            <a:r>
+              <a:rPr sz="1650" b="0">
+                <a:solidFill>
+                  <a:srgbClr val="23262E"/>
+                </a:solidFill>
+                <a:latin typeface="Noto Sans TC"/>
+                <a:ea typeface="Noto Sans TC"/>
+              </a:rPr>
+              <a:t>內文到這個量大概就是一頁的上限。再多就拆成兩頁，或改用三欄重點、步驟流程把重點並列；不要縮字硬塞，也不要把行距壓扁，那樣看起來就不像同一份簡報了。</a:t>
+            </a:r>
+          </a:p>
+        </p:txBody>
+      </p:sp>
+      <p:sp>
+        <p:nvSpPr>
+          <p:cNvPr id="8" name="TextBox 7"/>
+          <p:cNvSpPr txBox="1"/>
+          <p:nvPr/>
+        </p:nvSpPr>
+        <p:spPr>
+          <a:xfrm>
+            <a:off x="914400" y="4802385"/>
+            <a:ext cx="9963150" cy="792360"/>
+          </a:xfrm>
+          <a:prstGeom prst="rect">
+            <a:avLst/>
+          </a:prstGeom>
+          <a:noFill/>
+        </p:spPr>
+        <p:txBody>
+          <a:bodyPr wrap="square" lIns="0" rIns="0" tIns="0" bIns="0" anchor="t">
+            <a:spAutoFit/>
+          </a:bodyPr>
+          <a:lstStyle/>
+          <a:p>
+            <a:pPr algn="l">
+              <a:lnSpc>
+                <a:spcPts val="2970"/>
+              </a:lnSpc>
+            </a:pPr>
+            <a:r>
+              <a:rPr sz="1650" b="0">
+                <a:solidFill>
+                  <a:srgbClr val="23262E"/>
+                </a:solidFill>
+                <a:latin typeface="Noto Sans TC"/>
+                <a:ea typeface="Noto Sans TC"/>
+              </a:rPr>
+              <a:t>最後一段留給補充：數字要有出處、名詞前後一致、日期用絕對值。這些寫在大腦的禁區裡，AI 排版時會照做，你交件前只要對一次就好。</a:t>
+            </a:r>
+          </a:p>
+        </p:txBody>
+      </p:sp>
+      <p:sp>
+        <p:nvSpPr>
+          <p:cNvPr id="9" name="TextBox 8"/>
           <p:cNvSpPr txBox="1"/>
           <p:nvPr/>
         </p:nvSpPr>
@@ -5743,7 +6064,7 @@
       <p:grpSpPr/>
       <p:pic>
         <p:nvPicPr>
-          <p:cNvPr id="2" name="Picture 1" descr="warm-3-bake.jpg"/>
+          <p:cNvPr id="2" name="Picture 1" descr="warm-6-bake.jpg"/>
           <p:cNvPicPr>
             <a:picLocks noChangeAspect="1"/>
           </p:cNvPicPr>
@@ -5795,7 +6116,7 @@
             <a:r>
               <a:rPr sz="1350" b="0" spc="405">
                 <a:solidFill>
-                  <a:srgbClr val="FFF9F0"/>
+                  <a:srgbClr val="2F4B8A"/>
                 </a:solidFill>
                 <a:latin typeface="Iansui"/>
                 <a:ea typeface="Iansui"/>
@@ -5813,36 +6134,34 @@
         </p:nvSpPr>
         <p:spPr>
           <a:xfrm>
-            <a:off x="914400" y="2472630"/>
-            <a:ext cx="10420350" cy="1181100"/>
-          </a:xfrm>
-          <a:prstGeom prst="rect">
-            <a:avLst/>
-          </a:prstGeom>
-          <a:noFill/>
-        </p:spPr>
-        <p:txBody>
-          <a:bodyPr wrap="square" lIns="0" rIns="0" tIns="0" bIns="0" anchor="t">
-            <a:spAutoFit/>
-          </a:bodyPr>
-          <a:lstStyle/>
-          <a:p>
-            <a:pPr algn="l">
-              <a:lnSpc>
-                <a:spcPts val="9000"/>
-              </a:lnSpc>
-            </a:pPr>
-            <a:r>
-              <a:rPr sz="9000" b="0">
-                <a:solidFill>
-                  <a:srgbClr val="FFF9F0">
-                    <a:alpha val="35000"/>
-                  </a:srgbClr>
+            <a:off x="914400" y="1939379"/>
+            <a:ext cx="10420350" cy="1943100"/>
+          </a:xfrm>
+          <a:prstGeom prst="rect">
+            <a:avLst/>
+          </a:prstGeom>
+          <a:noFill/>
+        </p:spPr>
+        <p:txBody>
+          <a:bodyPr wrap="square" lIns="0" rIns="0" tIns="0" bIns="0" anchor="t">
+            <a:spAutoFit/>
+          </a:bodyPr>
+          <a:lstStyle/>
+          <a:p>
+            <a:pPr algn="l">
+              <a:lnSpc>
+                <a:spcPts val="15000"/>
+              </a:lnSpc>
+            </a:pPr>
+            <a:r>
+              <a:rPr sz="15000" b="0">
+                <a:solidFill>
+                  <a:srgbClr val="E4A11B"/>
                 </a:solidFill>
                 <a:latin typeface="Iansui"/>
                 <a:ea typeface="Iansui"/>
               </a:rPr>
-              <a:t>02</a:t>
+              <a:t>1,200 位</a:t>
             </a:r>
           </a:p>
         </p:txBody>
@@ -5855,34 +6174,34 @@
         </p:nvSpPr>
         <p:spPr>
           <a:xfrm>
-            <a:off x="914400" y="3691830"/>
-            <a:ext cx="10420350" cy="731490"/>
-          </a:xfrm>
-          <a:prstGeom prst="rect">
-            <a:avLst/>
-          </a:prstGeom>
-          <a:noFill/>
-        </p:spPr>
-        <p:txBody>
-          <a:bodyPr wrap="square" lIns="0" rIns="0" tIns="0" bIns="0" anchor="t">
-            <a:spAutoFit/>
-          </a:bodyPr>
-          <a:lstStyle/>
-          <a:p>
-            <a:pPr algn="l">
-              <a:lnSpc>
-                <a:spcPts val="5459"/>
-              </a:lnSpc>
-            </a:pPr>
-            <a:r>
-              <a:rPr sz="4200" b="0">
-                <a:solidFill>
-                  <a:srgbClr val="FFF9F0"/>
-                </a:solidFill>
-                <a:latin typeface="Iansui"/>
-                <a:ea typeface="Iansui"/>
-              </a:rPr>
-              <a:t>怎麼合作</a:t>
+            <a:off x="914400" y="4072979"/>
+            <a:ext cx="6153150" cy="415230"/>
+          </a:xfrm>
+          <a:prstGeom prst="rect">
+            <a:avLst/>
+          </a:prstGeom>
+          <a:noFill/>
+        </p:spPr>
+        <p:txBody>
+          <a:bodyPr wrap="square" lIns="0" rIns="0" tIns="0" bIns="0" anchor="t">
+            <a:spAutoFit/>
+          </a:bodyPr>
+          <a:lstStyle/>
+          <a:p>
+            <a:pPr algn="l">
+              <a:lnSpc>
+                <a:spcPts val="2970"/>
+              </a:lnSpc>
+            </a:pPr>
+            <a:r>
+              <a:rPr sz="1650" b="0">
+                <a:solidFill>
+                  <a:srgbClr val="23262E"/>
+                </a:solidFill>
+                <a:latin typeface="Noto Sans TC"/>
+                <a:ea typeface="Noto Sans TC"/>
+              </a:rPr>
+              <a:t>每週固定回購的鄰居。</a:t>
             </a:r>
           </a:p>
         </p:txBody>
@@ -5890,6 +6209,48 @@
       <p:sp>
         <p:nvSpPr>
           <p:cNvPr id="6" name="TextBox 5"/>
+          <p:cNvSpPr txBox="1"/>
+          <p:nvPr/>
+        </p:nvSpPr>
+        <p:spPr>
+          <a:xfrm>
+            <a:off x="914400" y="4678709"/>
+            <a:ext cx="6153150" cy="278010"/>
+          </a:xfrm>
+          <a:prstGeom prst="rect">
+            <a:avLst/>
+          </a:prstGeom>
+          <a:noFill/>
+        </p:spPr>
+        <p:txBody>
+          <a:bodyPr wrap="square" lIns="0" rIns="0" tIns="0" bIns="0" anchor="t">
+            <a:spAutoFit/>
+          </a:bodyPr>
+          <a:lstStyle/>
+          <a:p>
+            <a:pPr algn="l">
+              <a:lnSpc>
+                <a:spcPts val="1889"/>
+              </a:lnSpc>
+            </a:pPr>
+            <a:r>
+              <a:rPr sz="1050" b="0">
+                <a:solidFill>
+                  <a:srgbClr val="2F4B8A">
+                    <a:alpha val="85000"/>
+                  </a:srgbClr>
+                </a:solidFill>
+                <a:latin typeface="Noto Sans TC"/>
+                <a:ea typeface="Noto Sans TC"/>
+              </a:rPr>
+              <a:t>示意數字，換成你的。</a:t>
+            </a:r>
+          </a:p>
+        </p:txBody>
+      </p:sp>
+      <p:sp>
+        <p:nvSpPr>
+          <p:cNvPr id="7" name="TextBox 6"/>
           <p:cNvSpPr txBox="1"/>
           <p:nvPr/>
         </p:nvSpPr>
@@ -5917,7 +6278,7 @@
             <a:r>
               <a:rPr sz="1050" b="0">
                 <a:solidFill>
-                  <a:srgbClr val="FFF9F0"/>
+                  <a:srgbClr val="2F4B8A"/>
                 </a:solidFill>
                 <a:latin typeface="Noto Sans TC"/>
                 <a:ea typeface="Noto Sans TC"/>
@@ -5947,7 +6308,7 @@
       <p:grpSpPr/>
       <p:pic>
         <p:nvPicPr>
-          <p:cNvPr id="2" name="Picture 1" descr="warm-8-bake.jpg"/>
+          <p:cNvPr id="2" name="Picture 1" descr="warm-3-bake.jpg"/>
           <p:cNvPicPr>
             <a:picLocks noChangeAspect="1"/>
           </p:cNvPicPr>
@@ -5999,7 +6360,7 @@
             <a:r>
               <a:rPr sz="1350" b="0" spc="405">
                 <a:solidFill>
-                  <a:srgbClr val="2F4B8A"/>
+                  <a:srgbClr val="FFF9F0"/>
                 </a:solidFill>
                 <a:latin typeface="Iansui"/>
                 <a:ea typeface="Iansui"/>
@@ -6017,34 +6378,36 @@
         </p:nvSpPr>
         <p:spPr>
           <a:xfrm>
-            <a:off x="914400" y="914400"/>
-            <a:ext cx="10420350" cy="533400"/>
-          </a:xfrm>
-          <a:prstGeom prst="rect">
-            <a:avLst/>
-          </a:prstGeom>
-          <a:noFill/>
-        </p:spPr>
-        <p:txBody>
-          <a:bodyPr wrap="square" lIns="0" rIns="0" tIns="0" bIns="0" anchor="t">
-            <a:spAutoFit/>
-          </a:bodyPr>
-          <a:lstStyle/>
-          <a:p>
-            <a:pPr algn="l">
-              <a:lnSpc>
-                <a:spcPts val="3900"/>
-              </a:lnSpc>
-            </a:pPr>
-            <a:r>
-              <a:rPr sz="3000" b="0">
-                <a:solidFill>
-                  <a:srgbClr val="2F4B8A"/>
+            <a:off x="914400" y="2472630"/>
+            <a:ext cx="10420350" cy="1181100"/>
+          </a:xfrm>
+          <a:prstGeom prst="rect">
+            <a:avLst/>
+          </a:prstGeom>
+          <a:noFill/>
+        </p:spPr>
+        <p:txBody>
+          <a:bodyPr wrap="square" lIns="0" rIns="0" tIns="0" bIns="0" anchor="t">
+            <a:spAutoFit/>
+          </a:bodyPr>
+          <a:lstStyle/>
+          <a:p>
+            <a:pPr algn="l">
+              <a:lnSpc>
+                <a:spcPts val="9000"/>
+              </a:lnSpc>
+            </a:pPr>
+            <a:r>
+              <a:rPr sz="9000" b="0">
+                <a:solidFill>
+                  <a:srgbClr val="FFF9F0">
+                    <a:alpha val="35000"/>
+                  </a:srgbClr>
                 </a:solidFill>
                 <a:latin typeface="Iansui"/>
                 <a:ea typeface="Iansui"/>
               </a:rPr>
-              <a:t>三步開始</a:t>
+              <a:t>02</a:t>
             </a:r>
           </a:p>
         </p:txBody>
@@ -6057,34 +6420,34 @@
         </p:nvSpPr>
         <p:spPr>
           <a:xfrm>
-            <a:off x="1219200" y="2975669"/>
-            <a:ext cx="2647950" cy="419100"/>
-          </a:xfrm>
-          <a:prstGeom prst="rect">
-            <a:avLst/>
-          </a:prstGeom>
-          <a:noFill/>
-        </p:spPr>
-        <p:txBody>
-          <a:bodyPr wrap="square" lIns="0" rIns="0" tIns="0" bIns="0" anchor="t">
-            <a:spAutoFit/>
-          </a:bodyPr>
-          <a:lstStyle/>
-          <a:p>
-            <a:pPr algn="l">
-              <a:lnSpc>
-                <a:spcPts val="3000"/>
-              </a:lnSpc>
-            </a:pPr>
-            <a:r>
-              <a:rPr sz="3000" b="0">
-                <a:solidFill>
-                  <a:srgbClr val="E4A11B"/>
+            <a:off x="914400" y="3691830"/>
+            <a:ext cx="10420350" cy="731490"/>
+          </a:xfrm>
+          <a:prstGeom prst="rect">
+            <a:avLst/>
+          </a:prstGeom>
+          <a:noFill/>
+        </p:spPr>
+        <p:txBody>
+          <a:bodyPr wrap="square" lIns="0" rIns="0" tIns="0" bIns="0" anchor="t">
+            <a:spAutoFit/>
+          </a:bodyPr>
+          <a:lstStyle/>
+          <a:p>
+            <a:pPr algn="l">
+              <a:lnSpc>
+                <a:spcPts val="5459"/>
+              </a:lnSpc>
+            </a:pPr>
+            <a:r>
+              <a:rPr sz="4200" b="0">
+                <a:solidFill>
+                  <a:srgbClr val="FFF9F0"/>
                 </a:solidFill>
                 <a:latin typeface="Iansui"/>
                 <a:ea typeface="Iansui"/>
               </a:rPr>
-              <a:t>01</a:t>
+              <a:t>怎麼合作</a:t>
             </a:r>
           </a:p>
         </p:txBody>
@@ -6092,326 +6455,6 @@
       <p:sp>
         <p:nvSpPr>
           <p:cNvPr id="6" name="TextBox 5"/>
-          <p:cNvSpPr txBox="1"/>
-          <p:nvPr/>
-        </p:nvSpPr>
-        <p:spPr>
-          <a:xfrm>
-            <a:off x="1219200" y="3490019"/>
-            <a:ext cx="2647950" cy="342900"/>
-          </a:xfrm>
-          <a:prstGeom prst="rect">
-            <a:avLst/>
-          </a:prstGeom>
-          <a:noFill/>
-        </p:spPr>
-        <p:txBody>
-          <a:bodyPr wrap="square" lIns="0" rIns="0" tIns="0" bIns="0" anchor="t">
-            <a:spAutoFit/>
-          </a:bodyPr>
-          <a:lstStyle/>
-          <a:p>
-            <a:pPr algn="l">
-              <a:lnSpc>
-                <a:spcPts val="2400"/>
-              </a:lnSpc>
-            </a:pPr>
-            <a:r>
-              <a:rPr sz="1650" b="0">
-                <a:solidFill>
-                  <a:srgbClr val="2F4B8A"/>
-                </a:solidFill>
-                <a:latin typeface="Noto Sans TC"/>
-                <a:ea typeface="Noto Sans TC"/>
-              </a:rPr>
-              <a:t>試吃</a:t>
-            </a:r>
-          </a:p>
-        </p:txBody>
-      </p:sp>
-      <p:sp>
-        <p:nvSpPr>
-          <p:cNvPr id="7" name="TextBox 6"/>
-          <p:cNvSpPr txBox="1"/>
-          <p:nvPr/>
-        </p:nvSpPr>
-        <p:spPr>
-          <a:xfrm>
-            <a:off x="1219200" y="3851969"/>
-            <a:ext cx="2647950" cy="415230"/>
-          </a:xfrm>
-          <a:prstGeom prst="rect">
-            <a:avLst/>
-          </a:prstGeom>
-          <a:noFill/>
-        </p:spPr>
-        <p:txBody>
-          <a:bodyPr wrap="square" lIns="0" rIns="0" tIns="0" bIns="0" anchor="t">
-            <a:spAutoFit/>
-          </a:bodyPr>
-          <a:lstStyle/>
-          <a:p>
-            <a:pPr algn="l">
-              <a:lnSpc>
-                <a:spcPts val="2970"/>
-              </a:lnSpc>
-            </a:pPr>
-            <a:r>
-              <a:rPr sz="1650" b="0">
-                <a:solidFill>
-                  <a:srgbClr val="23262E"/>
-                </a:solidFill>
-                <a:latin typeface="Noto Sans TC"/>
-                <a:ea typeface="Noto Sans TC"/>
-              </a:rPr>
-              <a:t>送一箱到店，你先吃。</a:t>
-            </a:r>
-          </a:p>
-        </p:txBody>
-      </p:sp>
-      <p:sp>
-        <p:nvSpPr>
-          <p:cNvPr id="8" name="TextBox 7"/>
-          <p:cNvSpPr txBox="1"/>
-          <p:nvPr/>
-        </p:nvSpPr>
-        <p:spPr>
-          <a:xfrm>
-            <a:off x="4800600" y="2975669"/>
-            <a:ext cx="2647950" cy="419100"/>
-          </a:xfrm>
-          <a:prstGeom prst="rect">
-            <a:avLst/>
-          </a:prstGeom>
-          <a:noFill/>
-        </p:spPr>
-        <p:txBody>
-          <a:bodyPr wrap="square" lIns="0" rIns="0" tIns="0" bIns="0" anchor="t">
-            <a:spAutoFit/>
-          </a:bodyPr>
-          <a:lstStyle/>
-          <a:p>
-            <a:pPr algn="l">
-              <a:lnSpc>
-                <a:spcPts val="3000"/>
-              </a:lnSpc>
-            </a:pPr>
-            <a:r>
-              <a:rPr sz="3000" b="0">
-                <a:solidFill>
-                  <a:srgbClr val="E4A11B"/>
-                </a:solidFill>
-                <a:latin typeface="Iansui"/>
-                <a:ea typeface="Iansui"/>
-              </a:rPr>
-              <a:t>02</a:t>
-            </a:r>
-          </a:p>
-        </p:txBody>
-      </p:sp>
-      <p:sp>
-        <p:nvSpPr>
-          <p:cNvPr id="9" name="TextBox 8"/>
-          <p:cNvSpPr txBox="1"/>
-          <p:nvPr/>
-        </p:nvSpPr>
-        <p:spPr>
-          <a:xfrm>
-            <a:off x="4800600" y="3490019"/>
-            <a:ext cx="2647950" cy="342900"/>
-          </a:xfrm>
-          <a:prstGeom prst="rect">
-            <a:avLst/>
-          </a:prstGeom>
-          <a:noFill/>
-        </p:spPr>
-        <p:txBody>
-          <a:bodyPr wrap="square" lIns="0" rIns="0" tIns="0" bIns="0" anchor="t">
-            <a:spAutoFit/>
-          </a:bodyPr>
-          <a:lstStyle/>
-          <a:p>
-            <a:pPr algn="l">
-              <a:lnSpc>
-                <a:spcPts val="2400"/>
-              </a:lnSpc>
-            </a:pPr>
-            <a:r>
-              <a:rPr sz="1650" b="0">
-                <a:solidFill>
-                  <a:srgbClr val="2F4B8A"/>
-                </a:solidFill>
-                <a:latin typeface="Noto Sans TC"/>
-                <a:ea typeface="Noto Sans TC"/>
-              </a:rPr>
-              <a:t>排品</a:t>
-            </a:r>
-          </a:p>
-        </p:txBody>
-      </p:sp>
-      <p:sp>
-        <p:nvSpPr>
-          <p:cNvPr id="10" name="TextBox 9"/>
-          <p:cNvSpPr txBox="1"/>
-          <p:nvPr/>
-        </p:nvSpPr>
-        <p:spPr>
-          <a:xfrm>
-            <a:off x="4800600" y="3851969"/>
-            <a:ext cx="2647950" cy="792360"/>
-          </a:xfrm>
-          <a:prstGeom prst="rect">
-            <a:avLst/>
-          </a:prstGeom>
-          <a:noFill/>
-        </p:spPr>
-        <p:txBody>
-          <a:bodyPr wrap="square" lIns="0" rIns="0" tIns="0" bIns="0" anchor="t">
-            <a:spAutoFit/>
-          </a:bodyPr>
-          <a:lstStyle/>
-          <a:p>
-            <a:pPr algn="l">
-              <a:lnSpc>
-                <a:spcPts val="2970"/>
-              </a:lnSpc>
-            </a:pPr>
-            <a:r>
-              <a:rPr sz="1650" b="0">
-                <a:solidFill>
-                  <a:srgbClr val="23262E"/>
-                </a:solidFill>
-                <a:latin typeface="Noto Sans TC"/>
-                <a:ea typeface="Noto Sans TC"/>
-              </a:rPr>
-              <a:t>一起挑三款最適合你的客人。</a:t>
-            </a:r>
-          </a:p>
-        </p:txBody>
-      </p:sp>
-      <p:sp>
-        <p:nvSpPr>
-          <p:cNvPr id="11" name="TextBox 10"/>
-          <p:cNvSpPr txBox="1"/>
-          <p:nvPr/>
-        </p:nvSpPr>
-        <p:spPr>
-          <a:xfrm>
-            <a:off x="8382000" y="2975669"/>
-            <a:ext cx="2647950" cy="419100"/>
-          </a:xfrm>
-          <a:prstGeom prst="rect">
-            <a:avLst/>
-          </a:prstGeom>
-          <a:noFill/>
-        </p:spPr>
-        <p:txBody>
-          <a:bodyPr wrap="square" lIns="0" rIns="0" tIns="0" bIns="0" anchor="t">
-            <a:spAutoFit/>
-          </a:bodyPr>
-          <a:lstStyle/>
-          <a:p>
-            <a:pPr algn="l">
-              <a:lnSpc>
-                <a:spcPts val="3000"/>
-              </a:lnSpc>
-            </a:pPr>
-            <a:r>
-              <a:rPr sz="3000" b="0">
-                <a:solidFill>
-                  <a:srgbClr val="E4A11B"/>
-                </a:solidFill>
-                <a:latin typeface="Iansui"/>
-                <a:ea typeface="Iansui"/>
-              </a:rPr>
-              <a:t>03</a:t>
-            </a:r>
-          </a:p>
-        </p:txBody>
-      </p:sp>
-      <p:sp>
-        <p:nvSpPr>
-          <p:cNvPr id="12" name="TextBox 11"/>
-          <p:cNvSpPr txBox="1"/>
-          <p:nvPr/>
-        </p:nvSpPr>
-        <p:spPr>
-          <a:xfrm>
-            <a:off x="8382000" y="3490019"/>
-            <a:ext cx="2647950" cy="342900"/>
-          </a:xfrm>
-          <a:prstGeom prst="rect">
-            <a:avLst/>
-          </a:prstGeom>
-          <a:noFill/>
-        </p:spPr>
-        <p:txBody>
-          <a:bodyPr wrap="square" lIns="0" rIns="0" tIns="0" bIns="0" anchor="t">
-            <a:spAutoFit/>
-          </a:bodyPr>
-          <a:lstStyle/>
-          <a:p>
-            <a:pPr algn="l">
-              <a:lnSpc>
-                <a:spcPts val="2400"/>
-              </a:lnSpc>
-            </a:pPr>
-            <a:r>
-              <a:rPr sz="1650" b="0">
-                <a:solidFill>
-                  <a:srgbClr val="2F4B8A"/>
-                </a:solidFill>
-                <a:latin typeface="Noto Sans TC"/>
-                <a:ea typeface="Noto Sans TC"/>
-              </a:rPr>
-              <a:t>固定送</a:t>
-            </a:r>
-          </a:p>
-        </p:txBody>
-      </p:sp>
-      <p:sp>
-        <p:nvSpPr>
-          <p:cNvPr id="13" name="TextBox 12"/>
-          <p:cNvSpPr txBox="1"/>
-          <p:nvPr/>
-        </p:nvSpPr>
-        <p:spPr>
-          <a:xfrm>
-            <a:off x="8382000" y="3851969"/>
-            <a:ext cx="2647950" cy="415230"/>
-          </a:xfrm>
-          <a:prstGeom prst="rect">
-            <a:avLst/>
-          </a:prstGeom>
-          <a:noFill/>
-        </p:spPr>
-        <p:txBody>
-          <a:bodyPr wrap="square" lIns="0" rIns="0" tIns="0" bIns="0" anchor="t">
-            <a:spAutoFit/>
-          </a:bodyPr>
-          <a:lstStyle/>
-          <a:p>
-            <a:pPr algn="l">
-              <a:lnSpc>
-                <a:spcPts val="2970"/>
-              </a:lnSpc>
-            </a:pPr>
-            <a:r>
-              <a:rPr sz="1650" b="0">
-                <a:solidFill>
-                  <a:srgbClr val="23262E"/>
-                </a:solidFill>
-                <a:latin typeface="Noto Sans TC"/>
-                <a:ea typeface="Noto Sans TC"/>
-              </a:rPr>
-              <a:t>每週三、六早上送到。</a:t>
-            </a:r>
-          </a:p>
-        </p:txBody>
-      </p:sp>
-      <p:sp>
-        <p:nvSpPr>
-          <p:cNvPr id="14" name="TextBox 13"/>
           <p:cNvSpPr txBox="1"/>
           <p:nvPr/>
         </p:nvSpPr>
@@ -6439,7 +6482,7 @@
             <a:r>
               <a:rPr sz="1050" b="0">
                 <a:solidFill>
-                  <a:srgbClr val="2F4B8A"/>
+                  <a:srgbClr val="FFF9F0"/>
                 </a:solidFill>
                 <a:latin typeface="Noto Sans TC"/>
                 <a:ea typeface="Noto Sans TC"/>
@@ -6539,7 +6582,7 @@
         </p:nvSpPr>
         <p:spPr>
           <a:xfrm>
-            <a:off x="914400" y="2840384"/>
+            <a:off x="914400" y="914400"/>
             <a:ext cx="10420350" cy="533400"/>
           </a:xfrm>
           <a:prstGeom prst="rect">
@@ -6566,7 +6609,7 @@
                 <a:latin typeface="Iansui"/>
                 <a:ea typeface="Iansui"/>
               </a:rPr>
-              <a:t>明天早上，先送一箱過去？</a:t>
+              <a:t>三步開始</a:t>
             </a:r>
           </a:p>
         </p:txBody>
@@ -6579,23 +6622,63 @@
         </p:nvSpPr>
         <p:spPr>
           <a:xfrm>
-            <a:off x="914400" y="3640484"/>
-            <a:ext cx="10420350" cy="415230"/>
-          </a:xfrm>
-          <a:prstGeom prst="rect">
-            <a:avLst/>
-          </a:prstGeom>
-          <a:noFill/>
-        </p:spPr>
-        <p:txBody>
-          <a:bodyPr wrap="square" lIns="0" rIns="0" tIns="0" bIns="0" anchor="t">
-            <a:spAutoFit/>
-          </a:bodyPr>
-          <a:lstStyle/>
-          <a:p>
-            <a:pPr algn="l">
-              <a:lnSpc>
-                <a:spcPts val="2970"/>
+            <a:off x="1219200" y="2975669"/>
+            <a:ext cx="2647950" cy="419100"/>
+          </a:xfrm>
+          <a:prstGeom prst="rect">
+            <a:avLst/>
+          </a:prstGeom>
+          <a:noFill/>
+        </p:spPr>
+        <p:txBody>
+          <a:bodyPr wrap="square" lIns="0" rIns="0" tIns="0" bIns="0" anchor="t">
+            <a:spAutoFit/>
+          </a:bodyPr>
+          <a:lstStyle/>
+          <a:p>
+            <a:pPr algn="l">
+              <a:lnSpc>
+                <a:spcPts val="3000"/>
+              </a:lnSpc>
+            </a:pPr>
+            <a:r>
+              <a:rPr sz="3000" b="0">
+                <a:solidFill>
+                  <a:srgbClr val="E4A11B"/>
+                </a:solidFill>
+                <a:latin typeface="Iansui"/>
+                <a:ea typeface="Iansui"/>
+              </a:rPr>
+              <a:t>01</a:t>
+            </a:r>
+          </a:p>
+        </p:txBody>
+      </p:sp>
+      <p:sp>
+        <p:nvSpPr>
+          <p:cNvPr id="6" name="TextBox 5"/>
+          <p:cNvSpPr txBox="1"/>
+          <p:nvPr/>
+        </p:nvSpPr>
+        <p:spPr>
+          <a:xfrm>
+            <a:off x="1219200" y="3490019"/>
+            <a:ext cx="2647950" cy="342900"/>
+          </a:xfrm>
+          <a:prstGeom prst="rect">
+            <a:avLst/>
+          </a:prstGeom>
+          <a:noFill/>
+        </p:spPr>
+        <p:txBody>
+          <a:bodyPr wrap="square" lIns="0" rIns="0" tIns="0" bIns="0" anchor="t">
+            <a:spAutoFit/>
+          </a:bodyPr>
+          <a:lstStyle/>
+          <a:p>
+            <a:pPr algn="l">
+              <a:lnSpc>
+                <a:spcPts val="2400"/>
               </a:lnSpc>
             </a:pPr>
             <a:r>
@@ -6606,14 +6689,294 @@
                 <a:latin typeface="Noto Sans TC"/>
                 <a:ea typeface="Noto Sans TC"/>
               </a:rPr>
-              <a:t>hi@littledays.example（示意，換成你的）</a:t>
-            </a:r>
-          </a:p>
-        </p:txBody>
-      </p:sp>
-      <p:sp>
-        <p:nvSpPr>
-          <p:cNvPr id="6" name="TextBox 5"/>
+              <a:t>試吃</a:t>
+            </a:r>
+          </a:p>
+        </p:txBody>
+      </p:sp>
+      <p:sp>
+        <p:nvSpPr>
+          <p:cNvPr id="7" name="TextBox 6"/>
+          <p:cNvSpPr txBox="1"/>
+          <p:nvPr/>
+        </p:nvSpPr>
+        <p:spPr>
+          <a:xfrm>
+            <a:off x="1219200" y="3851969"/>
+            <a:ext cx="2647950" cy="415230"/>
+          </a:xfrm>
+          <a:prstGeom prst="rect">
+            <a:avLst/>
+          </a:prstGeom>
+          <a:noFill/>
+        </p:spPr>
+        <p:txBody>
+          <a:bodyPr wrap="square" lIns="0" rIns="0" tIns="0" bIns="0" anchor="t">
+            <a:spAutoFit/>
+          </a:bodyPr>
+          <a:lstStyle/>
+          <a:p>
+            <a:pPr algn="l">
+              <a:lnSpc>
+                <a:spcPts val="2970"/>
+              </a:lnSpc>
+            </a:pPr>
+            <a:r>
+              <a:rPr sz="1650" b="0">
+                <a:solidFill>
+                  <a:srgbClr val="23262E"/>
+                </a:solidFill>
+                <a:latin typeface="Noto Sans TC"/>
+                <a:ea typeface="Noto Sans TC"/>
+              </a:rPr>
+              <a:t>送一箱到店，你先吃。</a:t>
+            </a:r>
+          </a:p>
+        </p:txBody>
+      </p:sp>
+      <p:sp>
+        <p:nvSpPr>
+          <p:cNvPr id="8" name="TextBox 7"/>
+          <p:cNvSpPr txBox="1"/>
+          <p:nvPr/>
+        </p:nvSpPr>
+        <p:spPr>
+          <a:xfrm>
+            <a:off x="4800600" y="2975669"/>
+            <a:ext cx="2647950" cy="419100"/>
+          </a:xfrm>
+          <a:prstGeom prst="rect">
+            <a:avLst/>
+          </a:prstGeom>
+          <a:noFill/>
+        </p:spPr>
+        <p:txBody>
+          <a:bodyPr wrap="square" lIns="0" rIns="0" tIns="0" bIns="0" anchor="t">
+            <a:spAutoFit/>
+          </a:bodyPr>
+          <a:lstStyle/>
+          <a:p>
+            <a:pPr algn="l">
+              <a:lnSpc>
+                <a:spcPts val="3000"/>
+              </a:lnSpc>
+            </a:pPr>
+            <a:r>
+              <a:rPr sz="3000" b="0">
+                <a:solidFill>
+                  <a:srgbClr val="E4A11B"/>
+                </a:solidFill>
+                <a:latin typeface="Iansui"/>
+                <a:ea typeface="Iansui"/>
+              </a:rPr>
+              <a:t>02</a:t>
+            </a:r>
+          </a:p>
+        </p:txBody>
+      </p:sp>
+      <p:sp>
+        <p:nvSpPr>
+          <p:cNvPr id="9" name="TextBox 8"/>
+          <p:cNvSpPr txBox="1"/>
+          <p:nvPr/>
+        </p:nvSpPr>
+        <p:spPr>
+          <a:xfrm>
+            <a:off x="4800600" y="3490019"/>
+            <a:ext cx="2647950" cy="342900"/>
+          </a:xfrm>
+          <a:prstGeom prst="rect">
+            <a:avLst/>
+          </a:prstGeom>
+          <a:noFill/>
+        </p:spPr>
+        <p:txBody>
+          <a:bodyPr wrap="square" lIns="0" rIns="0" tIns="0" bIns="0" anchor="t">
+            <a:spAutoFit/>
+          </a:bodyPr>
+          <a:lstStyle/>
+          <a:p>
+            <a:pPr algn="l">
+              <a:lnSpc>
+                <a:spcPts val="2400"/>
+              </a:lnSpc>
+            </a:pPr>
+            <a:r>
+              <a:rPr sz="1650" b="0">
+                <a:solidFill>
+                  <a:srgbClr val="2F4B8A"/>
+                </a:solidFill>
+                <a:latin typeface="Noto Sans TC"/>
+                <a:ea typeface="Noto Sans TC"/>
+              </a:rPr>
+              <a:t>排品</a:t>
+            </a:r>
+          </a:p>
+        </p:txBody>
+      </p:sp>
+      <p:sp>
+        <p:nvSpPr>
+          <p:cNvPr id="10" name="TextBox 9"/>
+          <p:cNvSpPr txBox="1"/>
+          <p:nvPr/>
+        </p:nvSpPr>
+        <p:spPr>
+          <a:xfrm>
+            <a:off x="4800600" y="3851969"/>
+            <a:ext cx="2647950" cy="792360"/>
+          </a:xfrm>
+          <a:prstGeom prst="rect">
+            <a:avLst/>
+          </a:prstGeom>
+          <a:noFill/>
+        </p:spPr>
+        <p:txBody>
+          <a:bodyPr wrap="square" lIns="0" rIns="0" tIns="0" bIns="0" anchor="t">
+            <a:spAutoFit/>
+          </a:bodyPr>
+          <a:lstStyle/>
+          <a:p>
+            <a:pPr algn="l">
+              <a:lnSpc>
+                <a:spcPts val="2970"/>
+              </a:lnSpc>
+            </a:pPr>
+            <a:r>
+              <a:rPr sz="1650" b="0">
+                <a:solidFill>
+                  <a:srgbClr val="23262E"/>
+                </a:solidFill>
+                <a:latin typeface="Noto Sans TC"/>
+                <a:ea typeface="Noto Sans TC"/>
+              </a:rPr>
+              <a:t>一起挑三款最適合你的客人。</a:t>
+            </a:r>
+          </a:p>
+        </p:txBody>
+      </p:sp>
+      <p:sp>
+        <p:nvSpPr>
+          <p:cNvPr id="11" name="TextBox 10"/>
+          <p:cNvSpPr txBox="1"/>
+          <p:nvPr/>
+        </p:nvSpPr>
+        <p:spPr>
+          <a:xfrm>
+            <a:off x="8382000" y="2975669"/>
+            <a:ext cx="2647950" cy="419100"/>
+          </a:xfrm>
+          <a:prstGeom prst="rect">
+            <a:avLst/>
+          </a:prstGeom>
+          <a:noFill/>
+        </p:spPr>
+        <p:txBody>
+          <a:bodyPr wrap="square" lIns="0" rIns="0" tIns="0" bIns="0" anchor="t">
+            <a:spAutoFit/>
+          </a:bodyPr>
+          <a:lstStyle/>
+          <a:p>
+            <a:pPr algn="l">
+              <a:lnSpc>
+                <a:spcPts val="3000"/>
+              </a:lnSpc>
+            </a:pPr>
+            <a:r>
+              <a:rPr sz="3000" b="0">
+                <a:solidFill>
+                  <a:srgbClr val="E4A11B"/>
+                </a:solidFill>
+                <a:latin typeface="Iansui"/>
+                <a:ea typeface="Iansui"/>
+              </a:rPr>
+              <a:t>03</a:t>
+            </a:r>
+          </a:p>
+        </p:txBody>
+      </p:sp>
+      <p:sp>
+        <p:nvSpPr>
+          <p:cNvPr id="12" name="TextBox 11"/>
+          <p:cNvSpPr txBox="1"/>
+          <p:nvPr/>
+        </p:nvSpPr>
+        <p:spPr>
+          <a:xfrm>
+            <a:off x="8382000" y="3490019"/>
+            <a:ext cx="2647950" cy="342900"/>
+          </a:xfrm>
+          <a:prstGeom prst="rect">
+            <a:avLst/>
+          </a:prstGeom>
+          <a:noFill/>
+        </p:spPr>
+        <p:txBody>
+          <a:bodyPr wrap="square" lIns="0" rIns="0" tIns="0" bIns="0" anchor="t">
+            <a:spAutoFit/>
+          </a:bodyPr>
+          <a:lstStyle/>
+          <a:p>
+            <a:pPr algn="l">
+              <a:lnSpc>
+                <a:spcPts val="2400"/>
+              </a:lnSpc>
+            </a:pPr>
+            <a:r>
+              <a:rPr sz="1650" b="0">
+                <a:solidFill>
+                  <a:srgbClr val="2F4B8A"/>
+                </a:solidFill>
+                <a:latin typeface="Noto Sans TC"/>
+                <a:ea typeface="Noto Sans TC"/>
+              </a:rPr>
+              <a:t>固定送</a:t>
+            </a:r>
+          </a:p>
+        </p:txBody>
+      </p:sp>
+      <p:sp>
+        <p:nvSpPr>
+          <p:cNvPr id="13" name="TextBox 12"/>
+          <p:cNvSpPr txBox="1"/>
+          <p:nvPr/>
+        </p:nvSpPr>
+        <p:spPr>
+          <a:xfrm>
+            <a:off x="8382000" y="3851969"/>
+            <a:ext cx="2647950" cy="415230"/>
+          </a:xfrm>
+          <a:prstGeom prst="rect">
+            <a:avLst/>
+          </a:prstGeom>
+          <a:noFill/>
+        </p:spPr>
+        <p:txBody>
+          <a:bodyPr wrap="square" lIns="0" rIns="0" tIns="0" bIns="0" anchor="t">
+            <a:spAutoFit/>
+          </a:bodyPr>
+          <a:lstStyle/>
+          <a:p>
+            <a:pPr algn="l">
+              <a:lnSpc>
+                <a:spcPts val="2970"/>
+              </a:lnSpc>
+            </a:pPr>
+            <a:r>
+              <a:rPr sz="1650" b="0">
+                <a:solidFill>
+                  <a:srgbClr val="23262E"/>
+                </a:solidFill>
+                <a:latin typeface="Noto Sans TC"/>
+                <a:ea typeface="Noto Sans TC"/>
+              </a:rPr>
+              <a:t>每週三、六早上送到。</a:t>
+            </a:r>
+          </a:p>
+        </p:txBody>
+      </p:sp>
+      <p:sp>
+        <p:nvSpPr>
+          <p:cNvPr id="14" name="TextBox 13"/>
           <p:cNvSpPr txBox="1"/>
           <p:nvPr/>
         </p:nvSpPr>
